--- a/classes/parte-5-explotacion-de-sistemas-y-binarios/121-escritura-de-shellcode/clase-121-presentacion.pptx
+++ b/classes/parte-5-explotacion-de-sistemas-y-binarios/121-escritura-de-shellcode/clase-121-presentacion.pptx
@@ -17,6 +17,9 @@
     <p:sldId id="265" r:id="rId16"/>
     <p:sldId id="266" r:id="rId17"/>
     <p:sldId id="267" r:id="rId18"/>
+    <p:sldId id="268" r:id="rId19"/>
+    <p:sldId id="269" r:id="rId20"/>
+    <p:sldId id="270" r:id="rId21"/>
   </p:sldIdLst>
   <p:sldSz cx="9144000" cy="6858000" type="screen4x3"/>
   <p:notesSz cx="6858000" cy="9144000"/>
@@ -3198,7 +3201,7 @@
                   <a:srgbClr val="0B3D2E"/>
                 </a:solidFill>
               </a:rPr>
-              <a:t>⚠️ Errores comunes</a:t>
+              <a:t>✍️ Ejercicios</a:t>
             </a:r>
           </a:p>
         </p:txBody>
@@ -3236,67 +3239,82 @@
                   <a:srgbClr val="22282E"/>
                 </a:solidFill>
               </a:rPr>
-              <a:t>•  Segfault en vez de shell — NX activo; compila el loader con -z execstack (laboratorio)</a:t>
-            </a:r>
-          </a:p>
-          <a:p>
-            <a:pPr>
-              <a:spcAft>
-                <a:spcPts val="600"/>
-              </a:spcAft>
-            </a:pPr>
-            <a:r>
-              <a:rPr sz="1500">
-                <a:solidFill>
-                  <a:srgbClr val="22282E"/>
-                </a:solidFill>
-              </a:rPr>
-              <a:t>•  El shellcode se trunca — Contiene \x00; usa xor/push+pop para inmediatos</a:t>
-            </a:r>
-          </a:p>
-          <a:p>
-            <a:pPr>
-              <a:spcAft>
-                <a:spcPts val="600"/>
-              </a:spcAft>
-            </a:pPr>
-            <a:r>
-              <a:rPr sz="1500">
-                <a:solidFill>
-                  <a:srgbClr val="22282E"/>
-                </a:solidFill>
-              </a:rPr>
-              <a:t>•  "/bin/sh" mal formado — Endianness incorrecta al empujar la cadena</a:t>
-            </a:r>
-          </a:p>
-          <a:p>
-            <a:pPr>
-              <a:spcAft>
-                <a:spcPts val="600"/>
-              </a:spcAft>
-            </a:pPr>
-            <a:r>
-              <a:rPr sz="1500">
-                <a:solidFill>
-                  <a:srgbClr val="22282E"/>
-                </a:solidFill>
-              </a:rPr>
-              <a:t>•  execve devuelve -1 — Argumentos mal colocados (RDI/RSI/RDX)</a:t>
-            </a:r>
-          </a:p>
-          <a:p>
-            <a:pPr>
-              <a:spcAft>
-                <a:spcPts val="600"/>
-              </a:spcAft>
-            </a:pPr>
-            <a:r>
-              <a:rPr sz="1500">
-                <a:solidFill>
-                  <a:srgbClr val="22282E"/>
-                </a:solidFill>
-              </a:rPr>
-              <a:t>•  Funciona suelto pero no inyectado — Direcciones/entorno distintos; usa registros relativos a RSP</a:t>
+              <a:t>•  Reescribe el shellcode para que ejecute /bin/ls en vez de una shell.</a:t>
+            </a:r>
+          </a:p>
+          <a:p>
+            <a:pPr>
+              <a:spcAft>
+                <a:spcPts val="600"/>
+              </a:spcAft>
+            </a:pPr>
+            <a:r>
+              <a:rPr sz="1500">
+                <a:solidFill>
+                  <a:srgbClr val="22282E"/>
+                </a:solidFill>
+              </a:rPr>
+              <a:t>•  Elimina cualquier byte nulo introducido y explica la técnica usada.</a:t>
+            </a:r>
+          </a:p>
+          <a:p>
+            <a:pPr>
+              <a:spcAft>
+                <a:spcPts val="600"/>
+              </a:spcAft>
+            </a:pPr>
+            <a:r>
+              <a:rPr sz="1500">
+                <a:solidFill>
+                  <a:srgbClr val="22282E"/>
+                </a:solidFill>
+              </a:rPr>
+              <a:t>•  Mide la longitud en bytes de tu shellcode y compárala con el de msfvenom.</a:t>
+            </a:r>
+          </a:p>
+          <a:p>
+            <a:pPr>
+              <a:spcAft>
+                <a:spcPts val="600"/>
+              </a:spcAft>
+            </a:pPr>
+            <a:r>
+              <a:rPr sz="1500">
+                <a:solidFill>
+                  <a:srgbClr val="22282E"/>
+                </a:solidFill>
+              </a:rPr>
+              <a:t>•  Escribe un shellcode que solo haga exit(7) y verifícalo con echo $?.</a:t>
+            </a:r>
+          </a:p>
+          <a:p>
+            <a:pPr>
+              <a:spcAft>
+                <a:spcPts val="600"/>
+              </a:spcAft>
+            </a:pPr>
+            <a:r>
+              <a:rPr sz="1500">
+                <a:solidFill>
+                  <a:srgbClr val="22282E"/>
+                </a:solidFill>
+              </a:rPr>
+              <a:t>•  Genera un shellcode con msfvenom -p linux/x64/exec CMD=id -f c y analízalo.</a:t>
+            </a:r>
+          </a:p>
+          <a:p>
+            <a:pPr>
+              <a:spcAft>
+                <a:spcPts val="600"/>
+              </a:spcAft>
+            </a:pPr>
+            <a:r>
+              <a:rPr sz="1500">
+                <a:solidFill>
+                  <a:srgbClr val="22282E"/>
+                </a:solidFill>
+              </a:rPr>
+              <a:t>•  Añade un NOP sled y explica cuándo aporta fiabilidad.</a:t>
             </a:r>
           </a:p>
         </p:txBody>
@@ -3347,7 +3365,7 @@
                   <a:srgbClr val="0B3D2E"/>
                 </a:solidFill>
               </a:rPr>
-              <a:t>❓ Preguntas frecuentes</a:t>
+              <a:t>📝 Reto verificable</a:t>
             </a:r>
           </a:p>
         </p:txBody>
@@ -3385,82 +3403,52 @@
                   <a:srgbClr val="22282E"/>
                 </a:solidFill>
               </a:rPr>
-              <a:t>•  ❓ ¿Por qué me obsesiono con los bytes nulos? Porque la mayoría de overflows nacen de funciones de</a:t>
-            </a:r>
-          </a:p>
-          <a:p>
-            <a:pPr>
-              <a:spcAft>
-                <a:spcPts val="600"/>
-              </a:spcAft>
-            </a:pPr>
-            <a:r>
-              <a:rPr sz="1500">
-                <a:solidFill>
-                  <a:srgbClr val="22282E"/>
-                </a:solidFill>
-              </a:rPr>
-              <a:t>•  cadena que se detienen en \x00, cortando tu payload.</a:t>
-            </a:r>
-          </a:p>
-          <a:p>
-            <a:pPr>
-              <a:spcAft>
-                <a:spcPts val="600"/>
-              </a:spcAft>
-            </a:pPr>
-            <a:r>
-              <a:rPr sz="1500">
-                <a:solidFill>
-                  <a:srgbClr val="22282E"/>
-                </a:solidFill>
-              </a:rPr>
-              <a:t>•  ❓ ¿Puedo usar shellcode de Internet? Para aprender, escribe el tuyo. En CTF a menudo se usa</a:t>
-            </a:r>
-          </a:p>
-          <a:p>
-            <a:pPr>
-              <a:spcAft>
-                <a:spcPts val="600"/>
-              </a:spcAft>
-            </a:pPr>
-            <a:r>
-              <a:rPr sz="1500">
-                <a:solidFill>
-                  <a:srgbClr val="22282E"/>
-                </a:solidFill>
-              </a:rPr>
-              <a:t>•  shellcraft, pero entender la mecánica es el objetivo.</a:t>
-            </a:r>
-          </a:p>
-          <a:p>
-            <a:pPr>
-              <a:spcAft>
-                <a:spcPts val="600"/>
-              </a:spcAft>
-            </a:pPr>
-            <a:r>
-              <a:rPr sz="1500">
-                <a:solidFill>
-                  <a:srgbClr val="22282E"/>
-                </a:solidFill>
-              </a:rPr>
-              <a:t>•  ❓ ¿El shellcode en el stack sigue siendo viable? Rara vez: NX lo bloquea. Se estudia para entender</a:t>
-            </a:r>
-          </a:p>
-          <a:p>
-            <a:pPr>
-              <a:spcAft>
-                <a:spcPts val="600"/>
-              </a:spcAft>
-            </a:pPr>
-            <a:r>
-              <a:rPr sz="1500">
-                <a:solidFill>
-                  <a:srgbClr val="22282E"/>
-                </a:solidFill>
-              </a:rPr>
-              <a:t>•  la base; luego se pasa a ROP/ret2libc.</a:t>
+              <a:t>•  Entrega un shellcode de 64 bits sin bytes nulos que lance /bin/sh, junto con el cargador C que</a:t>
+            </a:r>
+          </a:p>
+          <a:p>
+            <a:pPr>
+              <a:spcAft>
+                <a:spcPts val="600"/>
+              </a:spcAft>
+            </a:pPr>
+            <a:r>
+              <a:rPr sz="1500">
+                <a:solidFill>
+                  <a:srgbClr val="22282E"/>
+                </a:solidFill>
+              </a:rPr>
+              <a:t>•  lo ejecuta.</a:t>
+            </a:r>
+          </a:p>
+          <a:p>
+            <a:pPr>
+              <a:spcAft>
+                <a:spcPts val="600"/>
+              </a:spcAft>
+            </a:pPr>
+            <a:r>
+              <a:rPr sz="1500">
+                <a:solidFill>
+                  <a:srgbClr val="22282E"/>
+                </a:solidFill>
+              </a:rPr>
+              <a:t>•  Criterio de aceptación: ./loader abre una shell interactiva y python3 -c 'print(b"...".count(b"\x00"))'</a:t>
+            </a:r>
+          </a:p>
+          <a:p>
+            <a:pPr>
+              <a:spcAft>
+                <a:spcPts val="600"/>
+              </a:spcAft>
+            </a:pPr>
+            <a:r>
+              <a:rPr sz="1500">
+                <a:solidFill>
+                  <a:srgbClr val="22282E"/>
+                </a:solidFill>
+              </a:rPr>
+              <a:t>•  sobre tus bytes devuelve 0.</a:t>
             </a:r>
           </a:p>
         </p:txBody>
@@ -3511,7 +3499,7 @@
                   <a:srgbClr val="0B3D2E"/>
                 </a:solidFill>
               </a:rPr>
-              <a:t>🔗 Referencias</a:t>
+              <a:t>⚠️ Errores comunes</a:t>
             </a:r>
           </a:p>
         </p:txBody>
@@ -3549,6 +3537,319 @@
                   <a:srgbClr val="22282E"/>
                 </a:solidFill>
               </a:rPr>
+              <a:t>•  Segfault en vez de shell — NX activo; compila el loader con -z execstack (laboratorio)</a:t>
+            </a:r>
+          </a:p>
+          <a:p>
+            <a:pPr>
+              <a:spcAft>
+                <a:spcPts val="600"/>
+              </a:spcAft>
+            </a:pPr>
+            <a:r>
+              <a:rPr sz="1500">
+                <a:solidFill>
+                  <a:srgbClr val="22282E"/>
+                </a:solidFill>
+              </a:rPr>
+              <a:t>•  El shellcode se trunca — Contiene \x00; usa xor/push+pop para inmediatos</a:t>
+            </a:r>
+          </a:p>
+          <a:p>
+            <a:pPr>
+              <a:spcAft>
+                <a:spcPts val="600"/>
+              </a:spcAft>
+            </a:pPr>
+            <a:r>
+              <a:rPr sz="1500">
+                <a:solidFill>
+                  <a:srgbClr val="22282E"/>
+                </a:solidFill>
+              </a:rPr>
+              <a:t>•  "/bin/sh" mal formado — Endianness incorrecta al empujar la cadena</a:t>
+            </a:r>
+          </a:p>
+          <a:p>
+            <a:pPr>
+              <a:spcAft>
+                <a:spcPts val="600"/>
+              </a:spcAft>
+            </a:pPr>
+            <a:r>
+              <a:rPr sz="1500">
+                <a:solidFill>
+                  <a:srgbClr val="22282E"/>
+                </a:solidFill>
+              </a:rPr>
+              <a:t>•  execve devuelve -1 — Argumentos mal colocados (RDI/RSI/RDX)</a:t>
+            </a:r>
+          </a:p>
+          <a:p>
+            <a:pPr>
+              <a:spcAft>
+                <a:spcPts val="600"/>
+              </a:spcAft>
+            </a:pPr>
+            <a:r>
+              <a:rPr sz="1500">
+                <a:solidFill>
+                  <a:srgbClr val="22282E"/>
+                </a:solidFill>
+              </a:rPr>
+              <a:t>•  Funciona suelto pero no inyectado — Direcciones/entorno distintos; usa registros relativos a RSP</a:t>
+            </a:r>
+          </a:p>
+        </p:txBody>
+      </p:sp>
+    </p:spTree>
+  </p:cSld>
+  <p:clrMapOvr>
+    <a:masterClrMapping/>
+  </p:clrMapOvr>
+</p:sld>
+</file>
+
+<file path=ppt/slides/slide13.xml><?xml version="1.0" encoding="utf-8"?>
+<p:sld xmlns:a="http://schemas.openxmlformats.org/drawingml/2006/main" xmlns:p="http://schemas.openxmlformats.org/presentationml/2006/main" xmlns:r="http://schemas.openxmlformats.org/officeDocument/2006/relationships">
+  <p:cSld>
+    <p:spTree>
+      <p:nvGrpSpPr>
+        <p:cNvPr id="1" name=""/>
+        <p:cNvGrpSpPr/>
+        <p:nvPr/>
+      </p:nvGrpSpPr>
+      <p:grpSpPr/>
+      <p:sp>
+        <p:nvSpPr>
+          <p:cNvPr id="2" name="TextBox 1"/>
+          <p:cNvSpPr txBox="1"/>
+          <p:nvPr/>
+        </p:nvSpPr>
+        <p:spPr>
+          <a:xfrm>
+            <a:off x="457200" y="320040"/>
+            <a:ext cx="8229600" cy="822960"/>
+          </a:xfrm>
+          <a:prstGeom prst="rect">
+            <a:avLst/>
+          </a:prstGeom>
+          <a:noFill/>
+        </p:spPr>
+        <p:txBody>
+          <a:bodyPr wrap="square">
+            <a:spAutoFit/>
+          </a:bodyPr>
+          <a:lstStyle/>
+          <a:p>
+            <a:r>
+              <a:rPr sz="2600" b="1">
+                <a:solidFill>
+                  <a:srgbClr val="0B3D2E"/>
+                </a:solidFill>
+              </a:rPr>
+              <a:t>❓ Preguntas frecuentes</a:t>
+            </a:r>
+          </a:p>
+        </p:txBody>
+      </p:sp>
+      <p:sp>
+        <p:nvSpPr>
+          <p:cNvPr id="3" name="TextBox 2"/>
+          <p:cNvSpPr txBox="1"/>
+          <p:nvPr/>
+        </p:nvSpPr>
+        <p:spPr>
+          <a:xfrm>
+            <a:off x="457200" y="1280160"/>
+            <a:ext cx="8229600" cy="4937760"/>
+          </a:xfrm>
+          <a:prstGeom prst="rect">
+            <a:avLst/>
+          </a:prstGeom>
+          <a:noFill/>
+        </p:spPr>
+        <p:txBody>
+          <a:bodyPr wrap="square">
+            <a:spAutoFit/>
+          </a:bodyPr>
+          <a:lstStyle/>
+          <a:p>
+            <a:pPr>
+              <a:spcAft>
+                <a:spcPts val="600"/>
+              </a:spcAft>
+            </a:pPr>
+            <a:r>
+              <a:rPr sz="1500">
+                <a:solidFill>
+                  <a:srgbClr val="22282E"/>
+                </a:solidFill>
+              </a:rPr>
+              <a:t>•  ❓ ¿Por qué me obsesiono con los bytes nulos? Porque la mayoría de overflows nacen de funciones de</a:t>
+            </a:r>
+          </a:p>
+          <a:p>
+            <a:pPr>
+              <a:spcAft>
+                <a:spcPts val="600"/>
+              </a:spcAft>
+            </a:pPr>
+            <a:r>
+              <a:rPr sz="1500">
+                <a:solidFill>
+                  <a:srgbClr val="22282E"/>
+                </a:solidFill>
+              </a:rPr>
+              <a:t>•  cadena que se detienen en \x00, cortando tu payload.</a:t>
+            </a:r>
+          </a:p>
+          <a:p>
+            <a:pPr>
+              <a:spcAft>
+                <a:spcPts val="600"/>
+              </a:spcAft>
+            </a:pPr>
+            <a:r>
+              <a:rPr sz="1500">
+                <a:solidFill>
+                  <a:srgbClr val="22282E"/>
+                </a:solidFill>
+              </a:rPr>
+              <a:t>•  ❓ ¿Puedo usar shellcode de Internet? Para aprender, escribe el tuyo. En CTF a menudo se usa</a:t>
+            </a:r>
+          </a:p>
+          <a:p>
+            <a:pPr>
+              <a:spcAft>
+                <a:spcPts val="600"/>
+              </a:spcAft>
+            </a:pPr>
+            <a:r>
+              <a:rPr sz="1500">
+                <a:solidFill>
+                  <a:srgbClr val="22282E"/>
+                </a:solidFill>
+              </a:rPr>
+              <a:t>•  shellcraft, pero entender la mecánica es el objetivo.</a:t>
+            </a:r>
+          </a:p>
+          <a:p>
+            <a:pPr>
+              <a:spcAft>
+                <a:spcPts val="600"/>
+              </a:spcAft>
+            </a:pPr>
+            <a:r>
+              <a:rPr sz="1500">
+                <a:solidFill>
+                  <a:srgbClr val="22282E"/>
+                </a:solidFill>
+              </a:rPr>
+              <a:t>•  ❓ ¿El shellcode en el stack sigue siendo viable? Rara vez: NX lo bloquea. Se estudia para entender</a:t>
+            </a:r>
+          </a:p>
+          <a:p>
+            <a:pPr>
+              <a:spcAft>
+                <a:spcPts val="600"/>
+              </a:spcAft>
+            </a:pPr>
+            <a:r>
+              <a:rPr sz="1500">
+                <a:solidFill>
+                  <a:srgbClr val="22282E"/>
+                </a:solidFill>
+              </a:rPr>
+              <a:t>•  la base; luego se pasa a ROP/ret2libc.</a:t>
+            </a:r>
+          </a:p>
+        </p:txBody>
+      </p:sp>
+    </p:spTree>
+  </p:cSld>
+  <p:clrMapOvr>
+    <a:masterClrMapping/>
+  </p:clrMapOvr>
+</p:sld>
+</file>
+
+<file path=ppt/slides/slide14.xml><?xml version="1.0" encoding="utf-8"?>
+<p:sld xmlns:a="http://schemas.openxmlformats.org/drawingml/2006/main" xmlns:p="http://schemas.openxmlformats.org/presentationml/2006/main" xmlns:r="http://schemas.openxmlformats.org/officeDocument/2006/relationships">
+  <p:cSld>
+    <p:spTree>
+      <p:nvGrpSpPr>
+        <p:cNvPr id="1" name=""/>
+        <p:cNvGrpSpPr/>
+        <p:nvPr/>
+      </p:nvGrpSpPr>
+      <p:grpSpPr/>
+      <p:sp>
+        <p:nvSpPr>
+          <p:cNvPr id="2" name="TextBox 1"/>
+          <p:cNvSpPr txBox="1"/>
+          <p:nvPr/>
+        </p:nvSpPr>
+        <p:spPr>
+          <a:xfrm>
+            <a:off x="457200" y="320040"/>
+            <a:ext cx="8229600" cy="822960"/>
+          </a:xfrm>
+          <a:prstGeom prst="rect">
+            <a:avLst/>
+          </a:prstGeom>
+          <a:noFill/>
+        </p:spPr>
+        <p:txBody>
+          <a:bodyPr wrap="square">
+            <a:spAutoFit/>
+          </a:bodyPr>
+          <a:lstStyle/>
+          <a:p>
+            <a:r>
+              <a:rPr sz="2600" b="1">
+                <a:solidFill>
+                  <a:srgbClr val="0B3D2E"/>
+                </a:solidFill>
+              </a:rPr>
+              <a:t>🔗 Referencias</a:t>
+            </a:r>
+          </a:p>
+        </p:txBody>
+      </p:sp>
+      <p:sp>
+        <p:nvSpPr>
+          <p:cNvPr id="3" name="TextBox 2"/>
+          <p:cNvSpPr txBox="1"/>
+          <p:nvPr/>
+        </p:nvSpPr>
+        <p:spPr>
+          <a:xfrm>
+            <a:off x="457200" y="1280160"/>
+            <a:ext cx="8229600" cy="4937760"/>
+          </a:xfrm>
+          <a:prstGeom prst="rect">
+            <a:avLst/>
+          </a:prstGeom>
+          <a:noFill/>
+        </p:spPr>
+        <p:txBody>
+          <a:bodyPr wrap="square">
+            <a:spAutoFit/>
+          </a:bodyPr>
+          <a:lstStyle/>
+          <a:p>
+            <a:pPr>
+              <a:spcAft>
+                <a:spcPts val="600"/>
+              </a:spcAft>
+            </a:pPr>
+            <a:r>
+              <a:rPr sz="1500">
+                <a:solidFill>
+                  <a:srgbClr val="22282E"/>
+                </a:solidFill>
+              </a:rPr>
               <a:t>•  Anley et al. The Shellcoder's Handbook, 2e. Wiley.</a:t>
             </a:r>
           </a:p>
@@ -3599,6 +3900,81 @@
           </a:p>
         </p:txBody>
       </p:sp>
+    </p:spTree>
+  </p:cSld>
+  <p:clrMapOvr>
+    <a:masterClrMapping/>
+  </p:clrMapOvr>
+</p:sld>
+</file>
+
+<file path=ppt/slides/slide15.xml><?xml version="1.0" encoding="utf-8"?>
+<p:sld xmlns:a="http://schemas.openxmlformats.org/drawingml/2006/main" xmlns:p="http://schemas.openxmlformats.org/presentationml/2006/main" xmlns:r="http://schemas.openxmlformats.org/officeDocument/2006/relationships">
+  <p:cSld>
+    <p:spTree>
+      <p:nvGrpSpPr>
+        <p:cNvPr id="1" name=""/>
+        <p:cNvGrpSpPr/>
+        <p:nvPr/>
+      </p:nvGrpSpPr>
+      <p:grpSpPr/>
+      <p:sp>
+        <p:nvSpPr>
+          <p:cNvPr id="2" name="TextBox 1"/>
+          <p:cNvSpPr txBox="1"/>
+          <p:nvPr/>
+        </p:nvSpPr>
+        <p:spPr>
+          <a:xfrm>
+            <a:off x="457200" y="274320"/>
+            <a:ext cx="8229600" cy="640080"/>
+          </a:xfrm>
+          <a:prstGeom prst="rect">
+            <a:avLst/>
+          </a:prstGeom>
+          <a:noFill/>
+        </p:spPr>
+        <p:txBody>
+          <a:bodyPr wrap="square">
+            <a:spAutoFit/>
+          </a:bodyPr>
+          <a:lstStyle/>
+          <a:p>
+            <a:r>
+              <a:rPr sz="2200" b="1">
+                <a:solidFill>
+                  <a:srgbClr val="0B3D2E"/>
+                </a:solidFill>
+              </a:rPr>
+              <a:t>Diagrama de la clase</a:t>
+            </a:r>
+          </a:p>
+        </p:txBody>
+      </p:sp>
+      <p:pic>
+        <p:nvPicPr>
+          <p:cNvPr id="3" name="Picture 2" descr="c445b2c7a1c74574.png"/>
+          <p:cNvPicPr>
+            <a:picLocks noChangeAspect="1"/>
+          </p:cNvPicPr>
+          <p:nvPr/>
+        </p:nvPicPr>
+        <p:blipFill>
+          <a:blip r:embed="rId2"/>
+          <a:stretch>
+            <a:fillRect/>
+          </a:stretch>
+        </p:blipFill>
+        <p:spPr>
+          <a:xfrm>
+            <a:off x="2403550" y="1097280"/>
+            <a:ext cx="4336900" cy="5303520"/>
+          </a:xfrm>
+          <a:prstGeom prst="rect">
+            <a:avLst/>
+          </a:prstGeom>
+        </p:spPr>
+      </p:pic>
     </p:spTree>
   </p:cSld>
   <p:clrMapOvr>
@@ -4122,7 +4498,7 @@
                   <a:srgbClr val="0B3D2E"/>
                 </a:solidFill>
               </a:rPr>
-              <a:t>📖 Definiciones y características</a:t>
+              <a:t>🧠 Explicación en profundidad</a:t>
             </a:r>
           </a:p>
         </p:txBody>
@@ -4160,97 +4536,97 @@
                   <a:srgbClr val="22282E"/>
                 </a:solidFill>
               </a:rPr>
-              <a:t>•  Shellcode: secuencia de opcodes autocontenida que realiza una acción al ejecutarse. Clave:</a:t>
-            </a:r>
-          </a:p>
-          <a:p>
-            <a:pPr>
-              <a:spcAft>
-                <a:spcPts val="600"/>
-              </a:spcAft>
-            </a:pPr>
-            <a:r>
-              <a:rPr sz="1500">
-                <a:solidFill>
-                  <a:srgbClr val="22282E"/>
-                </a:solidFill>
-              </a:rPr>
-              <a:t>•  suele evitar dependencias y direcciones absolutas.</a:t>
-            </a:r>
-          </a:p>
-          <a:p>
-            <a:pPr>
-              <a:spcAft>
-                <a:spcPts val="600"/>
-              </a:spcAft>
-            </a:pPr>
-            <a:r>
-              <a:rPr sz="1500">
-                <a:solidFill>
-                  <a:srgbClr val="22282E"/>
-                </a:solidFill>
-              </a:rPr>
-              <a:t>•  Syscall: llamada al kernel; en x64 se invoca con syscall y el número en RAX. Clave: execve</a:t>
-            </a:r>
-          </a:p>
-          <a:p>
-            <a:pPr>
-              <a:spcAft>
-                <a:spcPts val="600"/>
-              </a:spcAft>
-            </a:pPr>
-            <a:r>
-              <a:rPr sz="1500">
-                <a:solidFill>
-                  <a:srgbClr val="22282E"/>
-                </a:solidFill>
-              </a:rPr>
-              <a:t>•  es la 59; exit la 60.</a:t>
-            </a:r>
-          </a:p>
-          <a:p>
-            <a:pPr>
-              <a:spcAft>
-                <a:spcPts val="600"/>
-              </a:spcAft>
-            </a:pPr>
-            <a:r>
-              <a:rPr sz="1500">
-                <a:solidFill>
-                  <a:srgbClr val="22282E"/>
-                </a:solidFill>
-              </a:rPr>
-              <a:t>•  Byte nulo (\x00): termina cadenas en C; si aparece en el shellcode, funciones como strcpy</a:t>
-            </a:r>
-          </a:p>
-          <a:p>
-            <a:pPr>
-              <a:spcAft>
-                <a:spcPts val="600"/>
-              </a:spcAft>
-            </a:pPr>
-            <a:r>
-              <a:rPr sz="1500">
-                <a:solidFill>
-                  <a:srgbClr val="22282E"/>
-                </a:solidFill>
-              </a:rPr>
-              <a:t>•  lo truncan. Clave: se evita con xor reg, reg en vez de mov reg, 0.</a:t>
-            </a:r>
-          </a:p>
-          <a:p>
-            <a:pPr>
-              <a:spcAft>
-                <a:spcPts val="600"/>
-              </a:spcAft>
-            </a:pPr>
-            <a:r>
-              <a:rPr sz="1500">
-                <a:solidFill>
-                  <a:srgbClr val="22282E"/>
-                </a:solidFill>
-              </a:rPr>
-              <a:t>•  NOP sled: relleno de \x90 que da margen al salto. Clave: aumenta fiabilidad ante direcciones</a:t>
+              <a:t>•  Una vez que se controla RIP, hay que decidir qué ejecutar. El shellcode es la respuesta</a:t>
+            </a:r>
+          </a:p>
+          <a:p>
+            <a:pPr>
+              <a:spcAft>
+                <a:spcPts val="600"/>
+              </a:spcAft>
+            </a:pPr>
+            <a:r>
+              <a:rPr sz="1500">
+                <a:solidFill>
+                  <a:srgbClr val="22282E"/>
+                </a:solidFill>
+              </a:rPr>
+              <a:t>•  clásica: una secuencia de instrucciones en código máquina, normalmente diseñada para lanzar una</a:t>
+            </a:r>
+          </a:p>
+          <a:p>
+            <a:pPr>
+              <a:spcAft>
+                <a:spcPts val="600"/>
+              </a:spcAft>
+            </a:pPr>
+            <a:r>
+              <a:rPr sz="1500">
+                <a:solidFill>
+                  <a:srgbClr val="22282E"/>
+                </a:solidFill>
+              </a:rPr>
+              <a:t>•  shell (/bin/sh), que se inyecta en la memoria del proceso y a la que se salta. Escribir</a:t>
+            </a:r>
+          </a:p>
+          <a:p>
+            <a:pPr>
+              <a:spcAft>
+                <a:spcPts val="600"/>
+              </a:spcAft>
+            </a:pPr>
+            <a:r>
+              <a:rPr sz="1500">
+                <a:solidFill>
+                  <a:srgbClr val="22282E"/>
+                </a:solidFill>
+              </a:rPr>
+              <a:t>•  shellcode obliga a bajar al nivel más fundamental —hablar directamente con el kernel mediante</a:t>
+            </a:r>
+          </a:p>
+          <a:p>
+            <a:pPr>
+              <a:spcAft>
+                <a:spcPts val="600"/>
+              </a:spcAft>
+            </a:pPr>
+            <a:r>
+              <a:rPr sz="1500">
+                <a:solidFill>
+                  <a:srgbClr val="22282E"/>
+                </a:solidFill>
+              </a:rPr>
+              <a:t>•  llamadas al sistema (Clase 023)—, sin la comodidad de la biblioteca estándar,</a:t>
+            </a:r>
+          </a:p>
+          <a:p>
+            <a:pPr>
+              <a:spcAft>
+                <a:spcPts val="600"/>
+              </a:spcAft>
+            </a:pPr>
+            <a:r>
+              <a:rPr sz="1500">
+                <a:solidFill>
+                  <a:srgbClr val="22282E"/>
+                </a:solidFill>
+              </a:rPr>
+              <a:t>•  porque en el contexto de un exploit no hay un libc amistoso al que llamar de forma normal.</a:t>
+            </a:r>
+          </a:p>
+          <a:p>
+            <a:pPr>
+              <a:spcAft>
+                <a:spcPts val="600"/>
+              </a:spcAft>
+            </a:pPr>
+            <a:r>
+              <a:rPr sz="1500">
+                <a:solidFill>
+                  <a:srgbClr val="22282E"/>
+                </a:solidFill>
+              </a:rPr>
+              <a:t>•  Lanzar una shell se reduce a una llamada al sistema: execve("/bin/sh", NULL, NULL), que</a:t>
             </a:r>
           </a:p>
         </p:txBody>
@@ -4301,7 +4677,7 @@
                   <a:srgbClr val="0B3D2E"/>
                 </a:solidFill>
               </a:rPr>
-              <a:t>🧰 Herramientas y preparación</a:t>
+              <a:t>📖 Definiciones y características</a:t>
             </a:r>
           </a:p>
         </p:txBody>
@@ -4339,37 +4715,97 @@
                   <a:srgbClr val="22282E"/>
                 </a:solidFill>
               </a:rPr>
-              <a:t>•  sudo apt install -y nasm</a:t>
-            </a:r>
-          </a:p>
-          <a:p>
-            <a:pPr>
-              <a:spcAft>
-                <a:spcPts val="600"/>
-              </a:spcAft>
-            </a:pPr>
-            <a:r>
-              <a:rPr sz="1500">
-                <a:solidFill>
-                  <a:srgbClr val="22282E"/>
-                </a:solidFill>
-              </a:rPr>
-              <a:t>•  pip install pwntools</a:t>
-            </a:r>
-          </a:p>
-          <a:p>
-            <a:pPr>
-              <a:spcAft>
-                <a:spcPts val="600"/>
-              </a:spcAft>
-            </a:pPr>
-            <a:r>
-              <a:rPr sz="1500">
-                <a:solidFill>
-                  <a:srgbClr val="22282E"/>
-                </a:solidFill>
-              </a:rPr>
-              <a:t>•  Trabaja en la VM aislada. Los binarios de prueba se compilan con -z execstack solo para el laboratorio.</a:t>
+              <a:t>•  Shellcode: secuencia de opcodes autocontenida que realiza una acción al ejecutarse. Clave:</a:t>
+            </a:r>
+          </a:p>
+          <a:p>
+            <a:pPr>
+              <a:spcAft>
+                <a:spcPts val="600"/>
+              </a:spcAft>
+            </a:pPr>
+            <a:r>
+              <a:rPr sz="1500">
+                <a:solidFill>
+                  <a:srgbClr val="22282E"/>
+                </a:solidFill>
+              </a:rPr>
+              <a:t>•  suele evitar dependencias y direcciones absolutas.</a:t>
+            </a:r>
+          </a:p>
+          <a:p>
+            <a:pPr>
+              <a:spcAft>
+                <a:spcPts val="600"/>
+              </a:spcAft>
+            </a:pPr>
+            <a:r>
+              <a:rPr sz="1500">
+                <a:solidFill>
+                  <a:srgbClr val="22282E"/>
+                </a:solidFill>
+              </a:rPr>
+              <a:t>•  Syscall: llamada al kernel; en x64 se invoca con syscall y el número en RAX. Clave: execve</a:t>
+            </a:r>
+          </a:p>
+          <a:p>
+            <a:pPr>
+              <a:spcAft>
+                <a:spcPts val="600"/>
+              </a:spcAft>
+            </a:pPr>
+            <a:r>
+              <a:rPr sz="1500">
+                <a:solidFill>
+                  <a:srgbClr val="22282E"/>
+                </a:solidFill>
+              </a:rPr>
+              <a:t>•  es la 59; exit la 60.</a:t>
+            </a:r>
+          </a:p>
+          <a:p>
+            <a:pPr>
+              <a:spcAft>
+                <a:spcPts val="600"/>
+              </a:spcAft>
+            </a:pPr>
+            <a:r>
+              <a:rPr sz="1500">
+                <a:solidFill>
+                  <a:srgbClr val="22282E"/>
+                </a:solidFill>
+              </a:rPr>
+              <a:t>•  Byte nulo (\x00): termina cadenas en C; si aparece en el shellcode, funciones como strcpy</a:t>
+            </a:r>
+          </a:p>
+          <a:p>
+            <a:pPr>
+              <a:spcAft>
+                <a:spcPts val="600"/>
+              </a:spcAft>
+            </a:pPr>
+            <a:r>
+              <a:rPr sz="1500">
+                <a:solidFill>
+                  <a:srgbClr val="22282E"/>
+                </a:solidFill>
+              </a:rPr>
+              <a:t>•  lo truncan. Clave: se evita con xor reg, reg en vez de mov reg, 0.</a:t>
+            </a:r>
+          </a:p>
+          <a:p>
+            <a:pPr>
+              <a:spcAft>
+                <a:spcPts val="600"/>
+              </a:spcAft>
+            </a:pPr>
+            <a:r>
+              <a:rPr sz="1500">
+                <a:solidFill>
+                  <a:srgbClr val="22282E"/>
+                </a:solidFill>
+              </a:rPr>
+              <a:t>•  NOP sled: relleno de \x90 que da margen al salto. Clave: aumenta fiabilidad ante direcciones</a:t>
             </a:r>
           </a:p>
         </p:txBody>
@@ -4420,7 +4856,7 @@
                   <a:srgbClr val="0B3D2E"/>
                 </a:solidFill>
               </a:rPr>
-              <a:t>🧪 Laboratorio guiado</a:t>
+              <a:t>📔 Glosario</a:t>
             </a:r>
           </a:p>
         </p:txBody>
@@ -4458,97 +4894,97 @@
                   <a:srgbClr val="22282E"/>
                 </a:solidFill>
               </a:rPr>
-              <a:t>•  Escribe sh.asm (execve("/bin/sh", NULL, NULL)):</a:t>
-            </a:r>
-          </a:p>
-          <a:p>
-            <a:pPr>
-              <a:spcAft>
-                <a:spcPts val="600"/>
-              </a:spcAft>
-            </a:pPr>
-            <a:r>
-              <a:rPr sz="1500">
-                <a:solidFill>
-                  <a:srgbClr val="22282E"/>
-                </a:solidFill>
-              </a:rPr>
-              <a:t>•  section .text</a:t>
-            </a:r>
-          </a:p>
-          <a:p>
-            <a:pPr>
-              <a:spcAft>
-                <a:spcPts val="600"/>
-              </a:spcAft>
-            </a:pPr>
-            <a:r>
-              <a:rPr sz="1500">
-                <a:solidFill>
-                  <a:srgbClr val="22282E"/>
-                </a:solidFill>
-              </a:rPr>
-              <a:t>•  global start</a:t>
-            </a:r>
-          </a:p>
-          <a:p>
-            <a:pPr>
-              <a:spcAft>
-                <a:spcPts val="600"/>
-              </a:spcAft>
-            </a:pPr>
-            <a:r>
-              <a:rPr sz="1500">
-                <a:solidFill>
-                  <a:srgbClr val="22282E"/>
-                </a:solidFill>
-              </a:rPr>
-              <a:t>•  start:</a:t>
-            </a:r>
-          </a:p>
-          <a:p>
-            <a:pPr>
-              <a:spcAft>
-                <a:spcPts val="600"/>
-              </a:spcAft>
-            </a:pPr>
-            <a:r>
-              <a:rPr sz="1500">
-                <a:solidFill>
-                  <a:srgbClr val="22282E"/>
-                </a:solidFill>
-              </a:rPr>
-              <a:t>•  xor  rsi, rsi            ; argv = NULL  (sin bytes nulos)</a:t>
-            </a:r>
-          </a:p>
-          <a:p>
-            <a:pPr>
-              <a:spcAft>
-                <a:spcPts val="600"/>
-              </a:spcAft>
-            </a:pPr>
-            <a:r>
-              <a:rPr sz="1500">
-                <a:solidFill>
-                  <a:srgbClr val="22282E"/>
-                </a:solidFill>
-              </a:rPr>
-              <a:t>•  push rsi</a:t>
-            </a:r>
-          </a:p>
-          <a:p>
-            <a:pPr>
-              <a:spcAft>
-                <a:spcPts val="600"/>
-              </a:spcAft>
-            </a:pPr>
-            <a:r>
-              <a:rPr sz="1500">
-                <a:solidFill>
-                  <a:srgbClr val="22282E"/>
-                </a:solidFill>
-              </a:rPr>
-              <a:t>•  mov  rdi, 0x68732f6e69622f ; "/bin/sh\0" invertido</a:t>
+              <a:t>•  Término — Definición concisa</a:t>
+            </a:r>
+          </a:p>
+          <a:p>
+            <a:pPr>
+              <a:spcAft>
+                <a:spcPts val="600"/>
+              </a:spcAft>
+            </a:pPr>
+            <a:r>
+              <a:rPr sz="1500">
+                <a:solidFill>
+                  <a:srgbClr val="22282E"/>
+                </a:solidFill>
+              </a:rPr>
+              <a:t>•  Shellcode — Código máquina que se inyecta y ejecuta, típico para lanzar shell</a:t>
+            </a:r>
+          </a:p>
+          <a:p>
+            <a:pPr>
+              <a:spcAft>
+                <a:spcPts val="600"/>
+              </a:spcAft>
+            </a:pPr>
+            <a:r>
+              <a:rPr sz="1500">
+                <a:solidFill>
+                  <a:srgbClr val="22282E"/>
+                </a:solidFill>
+              </a:rPr>
+              <a:t>•  Syscall — Llamada al sistema; la vía directa al kernel</a:t>
+            </a:r>
+          </a:p>
+          <a:p>
+            <a:pPr>
+              <a:spcAft>
+                <a:spcPts val="600"/>
+              </a:spcAft>
+            </a:pPr>
+            <a:r>
+              <a:rPr sz="1500">
+                <a:solidFill>
+                  <a:srgbClr val="22282E"/>
+                </a:solidFill>
+              </a:rPr>
+              <a:t>•  execve — Syscall que reemplaza el proceso por otro (/bin/sh)</a:t>
+            </a:r>
+          </a:p>
+          <a:p>
+            <a:pPr>
+              <a:spcAft>
+                <a:spcPts val="600"/>
+              </a:spcAft>
+            </a:pPr>
+            <a:r>
+              <a:rPr sz="1500">
+                <a:solidFill>
+                  <a:srgbClr val="22282E"/>
+                </a:solidFill>
+              </a:rPr>
+              <a:t>•  Número de syscall — Va en RAX (execve = 59 en x64)</a:t>
+            </a:r>
+          </a:p>
+          <a:p>
+            <a:pPr>
+              <a:spcAft>
+                <a:spcPts val="600"/>
+              </a:spcAft>
+            </a:pPr>
+            <a:r>
+              <a:rPr sz="1500">
+                <a:solidFill>
+                  <a:srgbClr val="22282E"/>
+                </a:solidFill>
+              </a:rPr>
+              <a:t>•  Registros de syscall — RAX (número), RDI/RSI/RDX (argumentos)</a:t>
+            </a:r>
+          </a:p>
+          <a:p>
+            <a:pPr>
+              <a:spcAft>
+                <a:spcPts val="600"/>
+              </a:spcAft>
+            </a:pPr>
+            <a:r>
+              <a:rPr sz="1500">
+                <a:solidFill>
+                  <a:srgbClr val="22282E"/>
+                </a:solidFill>
+              </a:rPr>
+              <a:t>•  Opcodes — Bytes en crudo de las instrucciones</a:t>
             </a:r>
           </a:p>
         </p:txBody>
@@ -4599,7 +5035,7 @@
                   <a:srgbClr val="0B3D2E"/>
                 </a:solidFill>
               </a:rPr>
-              <a:t>✍️ Ejercicios</a:t>
+              <a:t>🧰 Herramientas y preparación</a:t>
             </a:r>
           </a:p>
         </p:txBody>
@@ -4637,82 +5073,7 @@
                   <a:srgbClr val="22282E"/>
                 </a:solidFill>
               </a:rPr>
-              <a:t>•  Reescribe el shellcode para que ejecute /bin/ls en vez de una shell.</a:t>
-            </a:r>
-          </a:p>
-          <a:p>
-            <a:pPr>
-              <a:spcAft>
-                <a:spcPts val="600"/>
-              </a:spcAft>
-            </a:pPr>
-            <a:r>
-              <a:rPr sz="1500">
-                <a:solidFill>
-                  <a:srgbClr val="22282E"/>
-                </a:solidFill>
-              </a:rPr>
-              <a:t>•  Elimina cualquier byte nulo introducido y explica la técnica usada.</a:t>
-            </a:r>
-          </a:p>
-          <a:p>
-            <a:pPr>
-              <a:spcAft>
-                <a:spcPts val="600"/>
-              </a:spcAft>
-            </a:pPr>
-            <a:r>
-              <a:rPr sz="1500">
-                <a:solidFill>
-                  <a:srgbClr val="22282E"/>
-                </a:solidFill>
-              </a:rPr>
-              <a:t>•  Mide la longitud en bytes de tu shellcode y compárala con el de msfvenom.</a:t>
-            </a:r>
-          </a:p>
-          <a:p>
-            <a:pPr>
-              <a:spcAft>
-                <a:spcPts val="600"/>
-              </a:spcAft>
-            </a:pPr>
-            <a:r>
-              <a:rPr sz="1500">
-                <a:solidFill>
-                  <a:srgbClr val="22282E"/>
-                </a:solidFill>
-              </a:rPr>
-              <a:t>•  Escribe un shellcode que solo haga exit(7) y verifícalo con echo $?.</a:t>
-            </a:r>
-          </a:p>
-          <a:p>
-            <a:pPr>
-              <a:spcAft>
-                <a:spcPts val="600"/>
-              </a:spcAft>
-            </a:pPr>
-            <a:r>
-              <a:rPr sz="1500">
-                <a:solidFill>
-                  <a:srgbClr val="22282E"/>
-                </a:solidFill>
-              </a:rPr>
-              <a:t>•  Genera un shellcode con msfvenom -p linux/x64/exec CMD=id -f c y analízalo.</a:t>
-            </a:r>
-          </a:p>
-          <a:p>
-            <a:pPr>
-              <a:spcAft>
-                <a:spcPts val="600"/>
-              </a:spcAft>
-            </a:pPr>
-            <a:r>
-              <a:rPr sz="1500">
-                <a:solidFill>
-                  <a:srgbClr val="22282E"/>
-                </a:solidFill>
-              </a:rPr>
-              <a:t>•  Añade un NOP sled y explica cuándo aporta fiabilidad.</a:t>
+              <a:t>•  Trabaja en la VM aislada. Los binarios de prueba se compilan con -z execstack solo para el laboratorio.</a:t>
             </a:r>
           </a:p>
         </p:txBody>
@@ -4763,7 +5124,7 @@
                   <a:srgbClr val="0B3D2E"/>
                 </a:solidFill>
               </a:rPr>
-              <a:t>📝 Reto verificable</a:t>
+              <a:t>🧪 Laboratorio guiado</a:t>
             </a:r>
           </a:p>
         </p:txBody>
@@ -4801,52 +5162,97 @@
                   <a:srgbClr val="22282E"/>
                 </a:solidFill>
               </a:rPr>
-              <a:t>•  Entrega un shellcode de 64 bits sin bytes nulos que lance /bin/sh, junto con el cargador C que</a:t>
-            </a:r>
-          </a:p>
-          <a:p>
-            <a:pPr>
-              <a:spcAft>
-                <a:spcPts val="600"/>
-              </a:spcAft>
-            </a:pPr>
-            <a:r>
-              <a:rPr sz="1500">
-                <a:solidFill>
-                  <a:srgbClr val="22282E"/>
-                </a:solidFill>
-              </a:rPr>
-              <a:t>•  lo ejecuta.</a:t>
-            </a:r>
-          </a:p>
-          <a:p>
-            <a:pPr>
-              <a:spcAft>
-                <a:spcPts val="600"/>
-              </a:spcAft>
-            </a:pPr>
-            <a:r>
-              <a:rPr sz="1500">
-                <a:solidFill>
-                  <a:srgbClr val="22282E"/>
-                </a:solidFill>
-              </a:rPr>
-              <a:t>•  Criterio de aceptación: ./loader abre una shell interactiva y python3 -c 'print(b"...".count(b"\x00"))'</a:t>
-            </a:r>
-          </a:p>
-          <a:p>
-            <a:pPr>
-              <a:spcAft>
-                <a:spcPts val="600"/>
-              </a:spcAft>
-            </a:pPr>
-            <a:r>
-              <a:rPr sz="1500">
-                <a:solidFill>
-                  <a:srgbClr val="22282E"/>
-                </a:solidFill>
-              </a:rPr>
-              <a:t>•  sobre tus bytes devuelve 0.</a:t>
+              <a:t>•  Escribe sh.asm (execve("/bin/sh", NULL, NULL)):</a:t>
+            </a:r>
+          </a:p>
+          <a:p>
+            <a:pPr>
+              <a:spcAft>
+                <a:spcPts val="600"/>
+              </a:spcAft>
+            </a:pPr>
+            <a:r>
+              <a:rPr sz="1500">
+                <a:solidFill>
+                  <a:srgbClr val="22282E"/>
+                </a:solidFill>
+              </a:rPr>
+              <a:t>•  Ensambla y prueba como binario:</a:t>
+            </a:r>
+          </a:p>
+          <a:p>
+            <a:pPr>
+              <a:spcAft>
+                <a:spcPts val="600"/>
+              </a:spcAft>
+            </a:pPr>
+            <a:r>
+              <a:rPr sz="1500">
+                <a:solidFill>
+                  <a:srgbClr val="22282E"/>
+                </a:solidFill>
+              </a:rPr>
+              <a:t>•  Extrae los opcodes:</a:t>
+            </a:r>
+          </a:p>
+          <a:p>
+            <a:pPr>
+              <a:spcAft>
+                <a:spcPts val="600"/>
+              </a:spcAft>
+            </a:pPr>
+            <a:r>
+              <a:rPr sz="1500">
+                <a:solidFill>
+                  <a:srgbClr val="22282E"/>
+                </a:solidFill>
+              </a:rPr>
+              <a:t>•  Verifica que no hay \x00. Si aparece, sustituye mov reg, 0 por xor reg, reg.</a:t>
+            </a:r>
+          </a:p>
+          <a:p>
+            <a:pPr>
+              <a:spcAft>
+                <a:spcPts val="600"/>
+              </a:spcAft>
+            </a:pPr>
+            <a:r>
+              <a:rPr sz="1500">
+                <a:solidFill>
+                  <a:srgbClr val="22282E"/>
+                </a:solidFill>
+              </a:rPr>
+              <a:t>•  Cárgalo desde C para probar en un contexto de exploit:</a:t>
+            </a:r>
+          </a:p>
+          <a:p>
+            <a:pPr>
+              <a:spcAft>
+                <a:spcPts val="600"/>
+              </a:spcAft>
+            </a:pPr>
+            <a:r>
+              <a:rPr sz="1500">
+                <a:solidFill>
+                  <a:srgbClr val="22282E"/>
+                </a:solidFill>
+              </a:rPr>
+              <a:t>•  Compara con pwntools: python3 -c 'from pwn import ; context.arch="amd64"; print(asm(shellcraft.sh()))'.</a:t>
+            </a:r>
+          </a:p>
+          <a:p>
+            <a:pPr>
+              <a:spcAft>
+                <a:spcPts val="600"/>
+              </a:spcAft>
+            </a:pPr>
+            <a:r>
+              <a:rPr sz="1500">
+                <a:solidFill>
+                  <a:srgbClr val="22282E"/>
+                </a:solidFill>
+              </a:rPr>
+              <a:t>•  Depura con GDB (break sc, stepi) si el shellcode no lanza la shell.</a:t>
             </a:r>
           </a:p>
         </p:txBody>
